--- a/output/presentations/hawkerbridge-round1.pptx
+++ b/output/presentations/hawkerbridge-round1.pptx
@@ -2,15 +2,15 @@
 <file path=ppt/presentation.xml><?xml version="1.0" encoding="utf-8"?>
 <p:presentation xmlns:p="http://schemas.openxmlformats.org/presentationml/2006/main">
   <p:sldMasterIdLst>
-    <p:sldMasterId xmlns:r="http://schemas.openxmlformats.org/officeDocument/2006/relationships" id="2147483648" r:id="R75b73eba690f44b9"/>
+    <p:sldMasterId xmlns:r="http://schemas.openxmlformats.org/officeDocument/2006/relationships" id="2147483648" r:id="R78f15efc309d415e"/>
   </p:sldMasterIdLst>
   <p:notesMasterIdLst>
-    <p:notesMasterId xmlns:r="http://schemas.openxmlformats.org/officeDocument/2006/relationships" r:id="R70341a65b94e403d"/>
+    <p:notesMasterId xmlns:r="http://schemas.openxmlformats.org/officeDocument/2006/relationships" r:id="Rabcd435c2b674905"/>
   </p:notesMasterIdLst>
   <p:sldIdLst>
-    <p:sldId xmlns:r="http://schemas.openxmlformats.org/officeDocument/2006/relationships" id="256" r:id="Raa5b59b1d2aa430e"/>
-    <p:sldId xmlns:r="http://schemas.openxmlformats.org/officeDocument/2006/relationships" id="257" r:id="R83266379b63c48c7"/>
-    <p:sldId xmlns:r="http://schemas.openxmlformats.org/officeDocument/2006/relationships" id="258" r:id="R7e5ccc81465b408b"/>
+    <p:sldId xmlns:r="http://schemas.openxmlformats.org/officeDocument/2006/relationships" id="256" r:id="Ra979dcfc14e3497a"/>
+    <p:sldId xmlns:r="http://schemas.openxmlformats.org/officeDocument/2006/relationships" id="257" r:id="Rdd75f4882a234a3f"/>
+    <p:sldId xmlns:r="http://schemas.openxmlformats.org/officeDocument/2006/relationships" id="258" r:id="R488fff60e9804497"/>
   </p:sldIdLst>
   <p:sldSz cx="12191695" cy="6858000"/>
   <p:notesSz cx="6858000" cy="9144000"/>
@@ -3893,7 +3893,7 @@
           <p:cNvPr id="2" name="Rectangle 1">
             <a:extLst xmlns:a="http://schemas.openxmlformats.org/drawingml/2006/main">
               <a:ext uri="{FF2B5EF4-FFF2-40B4-BE49-F238E27FC236}">
-                <a16:creationId xmlns:a16="http://schemas.microsoft.com/office/drawing/2014/main" id="{A179770E-CC86-4934-A9CA-857960358475}"/>
+                <a16:creationId xmlns:a16="http://schemas.microsoft.com/office/drawing/2014/main" id="{EDFF43DA-92D5-48AE-BD7E-457CF86FE83A}"/>
               </a:ext>
             </a:extLst>
           </p:cNvPr>
@@ -3946,7 +3946,7 @@
           <p:cNvPr id="3" name="TextBox 2">
             <a:extLst xmlns:a="http://schemas.openxmlformats.org/drawingml/2006/main">
               <a:ext uri="{FF2B5EF4-FFF2-40B4-BE49-F238E27FC236}">
-                <a16:creationId xmlns:a16="http://schemas.microsoft.com/office/drawing/2014/main" id="{3EFF35F4-646E-4372-AC4D-7C93107C2F9E}"/>
+                <a16:creationId xmlns:a16="http://schemas.microsoft.com/office/drawing/2014/main" id="{AF5417FB-6FB1-474F-82E1-7996BE5990AA}"/>
               </a:ext>
             </a:extLst>
           </p:cNvPr>
@@ -3996,7 +3996,7 @@
           <p:cNvPr id="4" name="TextBox 3">
             <a:extLst xmlns:a="http://schemas.openxmlformats.org/drawingml/2006/main">
               <a:ext uri="{FF2B5EF4-FFF2-40B4-BE49-F238E27FC236}">
-                <a16:creationId xmlns:a16="http://schemas.microsoft.com/office/drawing/2014/main" id="{9041C18C-B3BC-4118-9363-A65424B06A08}"/>
+                <a16:creationId xmlns:a16="http://schemas.microsoft.com/office/drawing/2014/main" id="{9F18916A-9FC4-4367-AEB8-07987D40AB5A}"/>
               </a:ext>
             </a:extLst>
           </p:cNvPr>
@@ -4046,7 +4046,7 @@
           <p:cNvPr id="5" name="TextBox 4">
             <a:extLst xmlns:a="http://schemas.openxmlformats.org/drawingml/2006/main">
               <a:ext uri="{FF2B5EF4-FFF2-40B4-BE49-F238E27FC236}">
-                <a16:creationId xmlns:a16="http://schemas.microsoft.com/office/drawing/2014/main" id="{39C8FF3E-D9A7-4B4D-A3B8-60C8BF625C17}"/>
+                <a16:creationId xmlns:a16="http://schemas.microsoft.com/office/drawing/2014/main" id="{130560C3-27D6-418C-960D-BD7FEDC7B92E}"/>
               </a:ext>
             </a:extLst>
           </p:cNvPr>
@@ -4297,7 +4297,7 @@
           <p:cNvPr id="6" name="TextBox 5">
             <a:extLst xmlns:a="http://schemas.openxmlformats.org/drawingml/2006/main">
               <a:ext uri="{FF2B5EF4-FFF2-40B4-BE49-F238E27FC236}">
-                <a16:creationId xmlns:a16="http://schemas.microsoft.com/office/drawing/2014/main" id="{A31D80B7-27D8-4ACE-9DA3-E4273D4D7EAC}"/>
+                <a16:creationId xmlns:a16="http://schemas.microsoft.com/office/drawing/2014/main" id="{39871BDB-01AC-4E2F-9AE6-04B4730E4889}"/>
               </a:ext>
             </a:extLst>
           </p:cNvPr>
@@ -4345,7 +4345,7 @@
     </p:spTree>
     <p:extLst>
       <p:ext uri="{BB962C8B-B14F-4D97-AF65-F5344CB8AC3E}">
-        <p14:creationId xmlns:p14="http://schemas.microsoft.com/office/powerpoint/2010/main" val="325409533"/>
+        <p14:creationId xmlns:p14="http://schemas.microsoft.com/office/powerpoint/2010/main" val="1866905862"/>
       </p:ext>
     </p:extLst>
   </p:cSld>
@@ -4369,7 +4369,7 @@
           <p:cNvPr id="2" name="Rectangle 1">
             <a:extLst xmlns:a="http://schemas.openxmlformats.org/drawingml/2006/main">
               <a:ext uri="{FF2B5EF4-FFF2-40B4-BE49-F238E27FC236}">
-                <a16:creationId xmlns:a16="http://schemas.microsoft.com/office/drawing/2014/main" id="{F4E6142E-E250-4A92-94E3-67C90B2062E2}"/>
+                <a16:creationId xmlns:a16="http://schemas.microsoft.com/office/drawing/2014/main" id="{69DC7D3C-06C3-49BD-AD31-F70C6080FFA2}"/>
               </a:ext>
             </a:extLst>
           </p:cNvPr>
@@ -4422,7 +4422,7 @@
           <p:cNvPr id="3" name="TextBox 2">
             <a:extLst xmlns:a="http://schemas.openxmlformats.org/drawingml/2006/main">
               <a:ext uri="{FF2B5EF4-FFF2-40B4-BE49-F238E27FC236}">
-                <a16:creationId xmlns:a16="http://schemas.microsoft.com/office/drawing/2014/main" id="{FC2B4800-29F4-4C60-B6BE-1747E2D0DFB4}"/>
+                <a16:creationId xmlns:a16="http://schemas.microsoft.com/office/drawing/2014/main" id="{9F06C1A1-00AA-4801-A83C-0FF97EBE5F4B}"/>
               </a:ext>
             </a:extLst>
           </p:cNvPr>
@@ -4472,7 +4472,7 @@
           <p:cNvPr id="4" name="TextBox 3">
             <a:extLst xmlns:a="http://schemas.openxmlformats.org/drawingml/2006/main">
               <a:ext uri="{FF2B5EF4-FFF2-40B4-BE49-F238E27FC236}">
-                <a16:creationId xmlns:a16="http://schemas.microsoft.com/office/drawing/2014/main" id="{5BC111C7-96F9-496B-BF8D-A21B7D6A6092}"/>
+                <a16:creationId xmlns:a16="http://schemas.microsoft.com/office/drawing/2014/main" id="{4DDFB0C0-DD98-47F8-9F4C-6D5A3C19F425}"/>
               </a:ext>
             </a:extLst>
           </p:cNvPr>
@@ -4522,7 +4522,7 @@
           <p:cNvPr id="5" name="TextBox 4">
             <a:extLst xmlns:a="http://schemas.openxmlformats.org/drawingml/2006/main">
               <a:ext uri="{FF2B5EF4-FFF2-40B4-BE49-F238E27FC236}">
-                <a16:creationId xmlns:a16="http://schemas.microsoft.com/office/drawing/2014/main" id="{7DD67CCE-F6DD-4313-8BA2-2EDBC83B1185}"/>
+                <a16:creationId xmlns:a16="http://schemas.microsoft.com/office/drawing/2014/main" id="{5D842432-A248-4BE9-9A82-115D7863024E}"/>
               </a:ext>
             </a:extLst>
           </p:cNvPr>
@@ -4729,7 +4729,7 @@
           <p:cNvPr id="6" name="TextBox 5">
             <a:extLst xmlns:a="http://schemas.openxmlformats.org/drawingml/2006/main">
               <a:ext uri="{FF2B5EF4-FFF2-40B4-BE49-F238E27FC236}">
-                <a16:creationId xmlns:a16="http://schemas.microsoft.com/office/drawing/2014/main" id="{910D0D31-782C-4D5A-9C0C-972C7377CC5F}"/>
+                <a16:creationId xmlns:a16="http://schemas.microsoft.com/office/drawing/2014/main" id="{8C36471E-5CC8-438C-80A1-7ED48048FE4E}"/>
               </a:ext>
             </a:extLst>
           </p:cNvPr>
@@ -4777,7 +4777,7 @@
     </p:spTree>
     <p:extLst>
       <p:ext uri="{BB962C8B-B14F-4D97-AF65-F5344CB8AC3E}">
-        <p14:creationId xmlns:p14="http://schemas.microsoft.com/office/powerpoint/2010/main" val="192173218"/>
+        <p14:creationId xmlns:p14="http://schemas.microsoft.com/office/powerpoint/2010/main" val="2100103881"/>
       </p:ext>
     </p:extLst>
   </p:cSld>
@@ -4801,7 +4801,7 @@
           <p:cNvPr id="2" name="Rectangle 1">
             <a:extLst xmlns:a="http://schemas.openxmlformats.org/drawingml/2006/main">
               <a:ext uri="{FF2B5EF4-FFF2-40B4-BE49-F238E27FC236}">
-                <a16:creationId xmlns:a16="http://schemas.microsoft.com/office/drawing/2014/main" id="{E8787E49-447E-4EDB-8079-30977E81B18C}"/>
+                <a16:creationId xmlns:a16="http://schemas.microsoft.com/office/drawing/2014/main" id="{39154F79-63C4-4190-B03E-CE04626CE5CA}"/>
               </a:ext>
             </a:extLst>
           </p:cNvPr>
@@ -4854,7 +4854,7 @@
           <p:cNvPr id="3" name="TextBox 2">
             <a:extLst xmlns:a="http://schemas.openxmlformats.org/drawingml/2006/main">
               <a:ext uri="{FF2B5EF4-FFF2-40B4-BE49-F238E27FC236}">
-                <a16:creationId xmlns:a16="http://schemas.microsoft.com/office/drawing/2014/main" id="{DBFFD79B-1BAD-40A4-A3DC-929F24ECB87C}"/>
+                <a16:creationId xmlns:a16="http://schemas.microsoft.com/office/drawing/2014/main" id="{33C83012-8ADE-457A-BB38-470149193B02}"/>
               </a:ext>
             </a:extLst>
           </p:cNvPr>
@@ -4904,7 +4904,7 @@
           <p:cNvPr id="4" name="TextBox 3">
             <a:extLst xmlns:a="http://schemas.openxmlformats.org/drawingml/2006/main">
               <a:ext uri="{FF2B5EF4-FFF2-40B4-BE49-F238E27FC236}">
-                <a16:creationId xmlns:a16="http://schemas.microsoft.com/office/drawing/2014/main" id="{2FB7FDCB-08A9-43FE-9F28-CE3C314932AD}"/>
+                <a16:creationId xmlns:a16="http://schemas.microsoft.com/office/drawing/2014/main" id="{A9B4E841-B929-4E03-A5B2-ACD2B7E40937}"/>
               </a:ext>
             </a:extLst>
           </p:cNvPr>
@@ -4954,7 +4954,7 @@
           <p:cNvPr id="5" name="TextBox 4">
             <a:extLst xmlns:a="http://schemas.openxmlformats.org/drawingml/2006/main">
               <a:ext uri="{FF2B5EF4-FFF2-40B4-BE49-F238E27FC236}">
-                <a16:creationId xmlns:a16="http://schemas.microsoft.com/office/drawing/2014/main" id="{E5C85147-7B4C-4DA6-AC7C-B05691744E96}"/>
+                <a16:creationId xmlns:a16="http://schemas.microsoft.com/office/drawing/2014/main" id="{3CBD2591-B197-44C3-8ACC-5B30FCEECF44}"/>
               </a:ext>
             </a:extLst>
           </p:cNvPr>
@@ -5107,7 +5107,7 @@
                 <a:ea typeface="Arial"/>
                 <a:cs typeface="Arial"/>
               </a:rPr>
-              <a:t> Fewer coordinator hours per closure and fewer residents reporting lost meal access. Pilot targets: halve planning time and verify every proposed site. A funded pilot and organisation subscription are commercial hypotheses, not sales.</a:t>
+              <a:t> Fewer coordinator hours per closure and fewer residents reporting lost meal access. Pilot targets: reduce planning time by 30% and verify every proposed site. A funded pilot and organisation subscription are commercial hypotheses, not sales.</a:t>
             </a:r>
           </a:p>
           <a:p xmlns:a="http://schemas.openxmlformats.org/drawingml/2006/main">
@@ -5161,7 +5161,7 @@
           <p:cNvPr id="6" name="TextBox 5">
             <a:extLst xmlns:a="http://schemas.openxmlformats.org/drawingml/2006/main">
               <a:ext uri="{FF2B5EF4-FFF2-40B4-BE49-F238E27FC236}">
-                <a16:creationId xmlns:a16="http://schemas.microsoft.com/office/drawing/2014/main" id="{0162A60F-D139-4B37-A3F1-0BAAF28E9F28}"/>
+                <a16:creationId xmlns:a16="http://schemas.microsoft.com/office/drawing/2014/main" id="{D3D41F0D-961C-470A-98E7-6557AAC658C0}"/>
               </a:ext>
             </a:extLst>
           </p:cNvPr>
@@ -5209,7 +5209,7 @@
     </p:spTree>
     <p:extLst>
       <p:ext uri="{BB962C8B-B14F-4D97-AF65-F5344CB8AC3E}">
-        <p14:creationId xmlns:p14="http://schemas.microsoft.com/office/powerpoint/2010/main" val="1804840422"/>
+        <p14:creationId xmlns:p14="http://schemas.microsoft.com/office/powerpoint/2010/main" val="1398157697"/>
       </p:ext>
     </p:extLst>
   </p:cSld>

--- a/output/presentations/hawkerbridge-round1.pptx
+++ b/output/presentations/hawkerbridge-round1.pptx
@@ -2,15 +2,15 @@
 <file path=ppt/presentation.xml><?xml version="1.0" encoding="utf-8"?>
 <p:presentation xmlns:p="http://schemas.openxmlformats.org/presentationml/2006/main">
   <p:sldMasterIdLst>
-    <p:sldMasterId xmlns:r="http://schemas.openxmlformats.org/officeDocument/2006/relationships" id="2147483648" r:id="R78f15efc309d415e"/>
+    <p:sldMasterId xmlns:r="http://schemas.openxmlformats.org/officeDocument/2006/relationships" id="2147483648" r:id="R73a55ca209764a71"/>
   </p:sldMasterIdLst>
   <p:notesMasterIdLst>
-    <p:notesMasterId xmlns:r="http://schemas.openxmlformats.org/officeDocument/2006/relationships" r:id="Rabcd435c2b674905"/>
+    <p:notesMasterId xmlns:r="http://schemas.openxmlformats.org/officeDocument/2006/relationships" r:id="R4d918cbbb4ab4cdf"/>
   </p:notesMasterIdLst>
   <p:sldIdLst>
-    <p:sldId xmlns:r="http://schemas.openxmlformats.org/officeDocument/2006/relationships" id="256" r:id="Ra979dcfc14e3497a"/>
-    <p:sldId xmlns:r="http://schemas.openxmlformats.org/officeDocument/2006/relationships" id="257" r:id="Rdd75f4882a234a3f"/>
-    <p:sldId xmlns:r="http://schemas.openxmlformats.org/officeDocument/2006/relationships" id="258" r:id="R488fff60e9804497"/>
+    <p:sldId xmlns:r="http://schemas.openxmlformats.org/officeDocument/2006/relationships" id="256" r:id="R743c3869df054fc2"/>
+    <p:sldId xmlns:r="http://schemas.openxmlformats.org/officeDocument/2006/relationships" id="257" r:id="Re8246cb206d94bbc"/>
+    <p:sldId xmlns:r="http://schemas.openxmlformats.org/officeDocument/2006/relationships" id="258" r:id="R97e92146020b4e84"/>
   </p:sldIdLst>
   <p:sldSz cx="12191695" cy="6858000"/>
   <p:notesSz cx="6858000" cy="9144000"/>
@@ -607,7 +607,7 @@
           <a:lstStyle xmlns:a="http://schemas.openxmlformats.org/drawingml/2006/main"/>
           <a:p xmlns:a="http://schemas.openxmlformats.org/drawingml/2006/main">
             <a:r>
-              <a:t>Architecture is implemented as a deployment package and locally tested but requires a verified Databricks workspace run before final submission. Free Edition is for non-commercial learning/prototyping: https://daisi.online/guide and https://docs.databricks.com/aws/en/getting-started/free-edition-limitations . Pilot targets and pricing are unvalidated. AI-assisted development is disclosed in the repository; project owner and presenter is Shivam Gupta.</a:t>
+              <a:t>A real Databricks live run published governed tables after 12 quality checks and 9 MLflow scenarios. Three tabular sources were fetched live; two checksum-verified URA archives retained their original timestamps. See submission/deployment-status.json and data/processed/databricks-publication.json. The separate local robustness benchmark has 15 scenarios. Free Edition is for non-commercial learning/prototyping: https://daisi.online/guide and https://docs.databricks.com/aws/en/getting-started/free-edition-limitations . Pilot targets and pricing are unvalidated. AI-assisted development is disclosed in the repository; project owner and presenter is Shivam Gupta.</a:t>
             </a:r>
           </a:p>
         </p:txBody>
@@ -3893,7 +3893,7 @@
           <p:cNvPr id="2" name="Rectangle 1">
             <a:extLst xmlns:a="http://schemas.openxmlformats.org/drawingml/2006/main">
               <a:ext uri="{FF2B5EF4-FFF2-40B4-BE49-F238E27FC236}">
-                <a16:creationId xmlns:a16="http://schemas.microsoft.com/office/drawing/2014/main" id="{EDFF43DA-92D5-48AE-BD7E-457CF86FE83A}"/>
+                <a16:creationId xmlns:a16="http://schemas.microsoft.com/office/drawing/2014/main" id="{6A72E5FB-AC6F-48C7-8F12-0465CE516B2B}"/>
               </a:ext>
             </a:extLst>
           </p:cNvPr>
@@ -3946,7 +3946,7 @@
           <p:cNvPr id="3" name="TextBox 2">
             <a:extLst xmlns:a="http://schemas.openxmlformats.org/drawingml/2006/main">
               <a:ext uri="{FF2B5EF4-FFF2-40B4-BE49-F238E27FC236}">
-                <a16:creationId xmlns:a16="http://schemas.microsoft.com/office/drawing/2014/main" id="{AF5417FB-6FB1-474F-82E1-7996BE5990AA}"/>
+                <a16:creationId xmlns:a16="http://schemas.microsoft.com/office/drawing/2014/main" id="{56E9D5E4-43BF-439F-9487-BDB572212EAE}"/>
               </a:ext>
             </a:extLst>
           </p:cNvPr>
@@ -3996,7 +3996,7 @@
           <p:cNvPr id="4" name="TextBox 3">
             <a:extLst xmlns:a="http://schemas.openxmlformats.org/drawingml/2006/main">
               <a:ext uri="{FF2B5EF4-FFF2-40B4-BE49-F238E27FC236}">
-                <a16:creationId xmlns:a16="http://schemas.microsoft.com/office/drawing/2014/main" id="{9F18916A-9FC4-4367-AEB8-07987D40AB5A}"/>
+                <a16:creationId xmlns:a16="http://schemas.microsoft.com/office/drawing/2014/main" id="{B9B415DA-19B9-48DB-90F4-39AE84BD44BB}"/>
               </a:ext>
             </a:extLst>
           </p:cNvPr>
@@ -4046,7 +4046,7 @@
           <p:cNvPr id="5" name="TextBox 4">
             <a:extLst xmlns:a="http://schemas.openxmlformats.org/drawingml/2006/main">
               <a:ext uri="{FF2B5EF4-FFF2-40B4-BE49-F238E27FC236}">
-                <a16:creationId xmlns:a16="http://schemas.microsoft.com/office/drawing/2014/main" id="{130560C3-27D6-418C-960D-BD7FEDC7B92E}"/>
+                <a16:creationId xmlns:a16="http://schemas.microsoft.com/office/drawing/2014/main" id="{11A4AAC3-5D89-47A5-919D-9AC4E6709C00}"/>
               </a:ext>
             </a:extLst>
           </p:cNvPr>
@@ -4297,7 +4297,7 @@
           <p:cNvPr id="6" name="TextBox 5">
             <a:extLst xmlns:a="http://schemas.openxmlformats.org/drawingml/2006/main">
               <a:ext uri="{FF2B5EF4-FFF2-40B4-BE49-F238E27FC236}">
-                <a16:creationId xmlns:a16="http://schemas.microsoft.com/office/drawing/2014/main" id="{39871BDB-01AC-4E2F-9AE6-04B4730E4889}"/>
+                <a16:creationId xmlns:a16="http://schemas.microsoft.com/office/drawing/2014/main" id="{7AC91C7F-7747-4D63-B45C-3522245F84F0}"/>
               </a:ext>
             </a:extLst>
           </p:cNvPr>
@@ -4345,7 +4345,7 @@
     </p:spTree>
     <p:extLst>
       <p:ext uri="{BB962C8B-B14F-4D97-AF65-F5344CB8AC3E}">
-        <p14:creationId xmlns:p14="http://schemas.microsoft.com/office/powerpoint/2010/main" val="1866905862"/>
+        <p14:creationId xmlns:p14="http://schemas.microsoft.com/office/powerpoint/2010/main" val="723970167"/>
       </p:ext>
     </p:extLst>
   </p:cSld>
@@ -4369,7 +4369,7 @@
           <p:cNvPr id="2" name="Rectangle 1">
             <a:extLst xmlns:a="http://schemas.openxmlformats.org/drawingml/2006/main">
               <a:ext uri="{FF2B5EF4-FFF2-40B4-BE49-F238E27FC236}">
-                <a16:creationId xmlns:a16="http://schemas.microsoft.com/office/drawing/2014/main" id="{69DC7D3C-06C3-49BD-AD31-F70C6080FFA2}"/>
+                <a16:creationId xmlns:a16="http://schemas.microsoft.com/office/drawing/2014/main" id="{DFBC552B-06D3-4E1B-B6AC-168790DFAD19}"/>
               </a:ext>
             </a:extLst>
           </p:cNvPr>
@@ -4422,7 +4422,7 @@
           <p:cNvPr id="3" name="TextBox 2">
             <a:extLst xmlns:a="http://schemas.openxmlformats.org/drawingml/2006/main">
               <a:ext uri="{FF2B5EF4-FFF2-40B4-BE49-F238E27FC236}">
-                <a16:creationId xmlns:a16="http://schemas.microsoft.com/office/drawing/2014/main" id="{9F06C1A1-00AA-4801-A83C-0FF97EBE5F4B}"/>
+                <a16:creationId xmlns:a16="http://schemas.microsoft.com/office/drawing/2014/main" id="{C6565453-DDED-43BF-B708-93B1176969B9}"/>
               </a:ext>
             </a:extLst>
           </p:cNvPr>
@@ -4472,7 +4472,7 @@
           <p:cNvPr id="4" name="TextBox 3">
             <a:extLst xmlns:a="http://schemas.openxmlformats.org/drawingml/2006/main">
               <a:ext uri="{FF2B5EF4-FFF2-40B4-BE49-F238E27FC236}">
-                <a16:creationId xmlns:a16="http://schemas.microsoft.com/office/drawing/2014/main" id="{4DDFB0C0-DD98-47F8-9F4C-6D5A3C19F425}"/>
+                <a16:creationId xmlns:a16="http://schemas.microsoft.com/office/drawing/2014/main" id="{7A4CDE82-D28A-42B2-A16D-DA1603D5BC9D}"/>
               </a:ext>
             </a:extLst>
           </p:cNvPr>
@@ -4522,7 +4522,7 @@
           <p:cNvPr id="5" name="TextBox 4">
             <a:extLst xmlns:a="http://schemas.openxmlformats.org/drawingml/2006/main">
               <a:ext uri="{FF2B5EF4-FFF2-40B4-BE49-F238E27FC236}">
-                <a16:creationId xmlns:a16="http://schemas.microsoft.com/office/drawing/2014/main" id="{5D842432-A248-4BE9-9A82-115D7863024E}"/>
+                <a16:creationId xmlns:a16="http://schemas.microsoft.com/office/drawing/2014/main" id="{D66C7F8B-BCBA-456A-AEF2-59574B546404}"/>
               </a:ext>
             </a:extLst>
           </p:cNvPr>
@@ -4729,7 +4729,7 @@
           <p:cNvPr id="6" name="TextBox 5">
             <a:extLst xmlns:a="http://schemas.openxmlformats.org/drawingml/2006/main">
               <a:ext uri="{FF2B5EF4-FFF2-40B4-BE49-F238E27FC236}">
-                <a16:creationId xmlns:a16="http://schemas.microsoft.com/office/drawing/2014/main" id="{8C36471E-5CC8-438C-80A1-7ED48048FE4E}"/>
+                <a16:creationId xmlns:a16="http://schemas.microsoft.com/office/drawing/2014/main" id="{417EDCBC-A8E6-478E-87D0-088D04E3FEC6}"/>
               </a:ext>
             </a:extLst>
           </p:cNvPr>
@@ -4777,7 +4777,7 @@
     </p:spTree>
     <p:extLst>
       <p:ext uri="{BB962C8B-B14F-4D97-AF65-F5344CB8AC3E}">
-        <p14:creationId xmlns:p14="http://schemas.microsoft.com/office/powerpoint/2010/main" val="2100103881"/>
+        <p14:creationId xmlns:p14="http://schemas.microsoft.com/office/powerpoint/2010/main" val="511374380"/>
       </p:ext>
     </p:extLst>
   </p:cSld>
@@ -4801,7 +4801,7 @@
           <p:cNvPr id="2" name="Rectangle 1">
             <a:extLst xmlns:a="http://schemas.openxmlformats.org/drawingml/2006/main">
               <a:ext uri="{FF2B5EF4-FFF2-40B4-BE49-F238E27FC236}">
-                <a16:creationId xmlns:a16="http://schemas.microsoft.com/office/drawing/2014/main" id="{39154F79-63C4-4190-B03E-CE04626CE5CA}"/>
+                <a16:creationId xmlns:a16="http://schemas.microsoft.com/office/drawing/2014/main" id="{13777F4C-90DF-4A5F-8988-95E8FC2B1BAA}"/>
               </a:ext>
             </a:extLst>
           </p:cNvPr>
@@ -4854,7 +4854,7 @@
           <p:cNvPr id="3" name="TextBox 2">
             <a:extLst xmlns:a="http://schemas.openxmlformats.org/drawingml/2006/main">
               <a:ext uri="{FF2B5EF4-FFF2-40B4-BE49-F238E27FC236}">
-                <a16:creationId xmlns:a16="http://schemas.microsoft.com/office/drawing/2014/main" id="{33C83012-8ADE-457A-BB38-470149193B02}"/>
+                <a16:creationId xmlns:a16="http://schemas.microsoft.com/office/drawing/2014/main" id="{2FDBD155-150F-434D-BB4B-7F03665FD397}"/>
               </a:ext>
             </a:extLst>
           </p:cNvPr>
@@ -4904,7 +4904,7 @@
           <p:cNvPr id="4" name="TextBox 3">
             <a:extLst xmlns:a="http://schemas.openxmlformats.org/drawingml/2006/main">
               <a:ext uri="{FF2B5EF4-FFF2-40B4-BE49-F238E27FC236}">
-                <a16:creationId xmlns:a16="http://schemas.microsoft.com/office/drawing/2014/main" id="{A9B4E841-B929-4E03-A5B2-ACD2B7E40937}"/>
+                <a16:creationId xmlns:a16="http://schemas.microsoft.com/office/drawing/2014/main" id="{029B9065-EE59-4D80-8AE3-6F33BAA46B4B}"/>
               </a:ext>
             </a:extLst>
           </p:cNvPr>
@@ -4954,7 +4954,7 @@
           <p:cNvPr id="5" name="TextBox 4">
             <a:extLst xmlns:a="http://schemas.openxmlformats.org/drawingml/2006/main">
               <a:ext uri="{FF2B5EF4-FFF2-40B4-BE49-F238E27FC236}">
-                <a16:creationId xmlns:a16="http://schemas.microsoft.com/office/drawing/2014/main" id="{3CBD2591-B197-44C3-8ACC-5B30FCEECF44}"/>
+                <a16:creationId xmlns:a16="http://schemas.microsoft.com/office/drawing/2014/main" id="{74C3A33A-6B1D-42A0-8CA3-8AF0D49A5355}"/>
               </a:ext>
             </a:extLst>
           </p:cNvPr>
@@ -5008,7 +5008,7 @@
                 <a:ea typeface="Arial"/>
                 <a:cs typeface="Arial"/>
               </a:rPr>
-              <a:t>Intended platform:</a:t>
+              <a:t>Working platform:</a:t>
             </a:r>
             <a:r>
               <a:rPr sz="1600">
@@ -5063,7 +5063,7 @@
                 <a:ea typeface="Arial"/>
                 <a:cs typeface="Arial"/>
               </a:rPr>
-              <a:t> An authenticated map, closure calendar, scope and budget controls, a saved plan with PDF export, plus a notebook run and a governed SQL evidence dashboard.</a:t>
+              <a:t> hawkerbridge-sg.web.app offers private plans and PDF export. A live Databricks job passed 12 quality gates and recorded 9 MLflow scenarios, with a SQL dashboard.</a:t>
             </a:r>
           </a:p>
           <a:p xmlns:a="http://schemas.openxmlformats.org/drawingml/2006/main">
@@ -5140,7 +5140,7 @@
                 <a:ea typeface="Arial"/>
                 <a:cs typeface="Arial"/>
               </a:rPr>
-              <a:t>Two-week sprint:</a:t>
+              <a:t>Next sprint:</a:t>
             </a:r>
             <a:r>
               <a:rPr sz="1600">
@@ -5151,7 +5151,7 @@
                 <a:ea typeface="Arial"/>
                 <a:cs typeface="Arial"/>
               </a:rPr>
-              <a:t> Deploy the tested local pipeline to Free Edition, validate locations with a coordinator, benchmark allocations and rehearse. Paid hosting follows a pilot.</a:t>
+              <a:t> Validate locations with a coordinator, measure planning time and repeat use, then test a paid pilot. Current prices and impact targets are hypotheses.</a:t>
             </a:r>
           </a:p>
         </p:txBody>
@@ -5161,7 +5161,7 @@
           <p:cNvPr id="6" name="TextBox 5">
             <a:extLst xmlns:a="http://schemas.openxmlformats.org/drawingml/2006/main">
               <a:ext uri="{FF2B5EF4-FFF2-40B4-BE49-F238E27FC236}">
-                <a16:creationId xmlns:a16="http://schemas.microsoft.com/office/drawing/2014/main" id="{D3D41F0D-961C-470A-98E7-6557AAC658C0}"/>
+                <a16:creationId xmlns:a16="http://schemas.microsoft.com/office/drawing/2014/main" id="{1063C419-2BFC-47B0-BD20-96CA123E5D3A}"/>
               </a:ext>
             </a:extLst>
           </p:cNvPr>
@@ -5209,7 +5209,7 @@
     </p:spTree>
     <p:extLst>
       <p:ext uri="{BB962C8B-B14F-4D97-AF65-F5344CB8AC3E}">
-        <p14:creationId xmlns:p14="http://schemas.microsoft.com/office/powerpoint/2010/main" val="1398157697"/>
+        <p14:creationId xmlns:p14="http://schemas.microsoft.com/office/powerpoint/2010/main" val="187888764"/>
       </p:ext>
     </p:extLst>
   </p:cSld>

--- a/output/presentations/hawkerbridge-round1.pptx
+++ b/output/presentations/hawkerbridge-round1.pptx
@@ -2,15 +2,15 @@
 <file path=ppt/presentation.xml><?xml version="1.0" encoding="utf-8"?>
 <p:presentation xmlns:p="http://schemas.openxmlformats.org/presentationml/2006/main">
   <p:sldMasterIdLst>
-    <p:sldMasterId xmlns:r="http://schemas.openxmlformats.org/officeDocument/2006/relationships" id="2147483648" r:id="R73a55ca209764a71"/>
+    <p:sldMasterId xmlns:r="http://schemas.openxmlformats.org/officeDocument/2006/relationships" id="2147483648" r:id="Rf8460eb261ad4f98"/>
   </p:sldMasterIdLst>
   <p:notesMasterIdLst>
-    <p:notesMasterId xmlns:r="http://schemas.openxmlformats.org/officeDocument/2006/relationships" r:id="R4d918cbbb4ab4cdf"/>
+    <p:notesMasterId xmlns:r="http://schemas.openxmlformats.org/officeDocument/2006/relationships" r:id="Re7dd374326644c36"/>
   </p:notesMasterIdLst>
   <p:sldIdLst>
-    <p:sldId xmlns:r="http://schemas.openxmlformats.org/officeDocument/2006/relationships" id="256" r:id="R743c3869df054fc2"/>
-    <p:sldId xmlns:r="http://schemas.openxmlformats.org/officeDocument/2006/relationships" id="257" r:id="Re8246cb206d94bbc"/>
-    <p:sldId xmlns:r="http://schemas.openxmlformats.org/officeDocument/2006/relationships" id="258" r:id="R97e92146020b4e84"/>
+    <p:sldId xmlns:r="http://schemas.openxmlformats.org/officeDocument/2006/relationships" id="256" r:id="R94cedffa8f0d42b7"/>
+    <p:sldId xmlns:r="http://schemas.openxmlformats.org/officeDocument/2006/relationships" id="257" r:id="R1278b27fc99646ad"/>
+    <p:sldId xmlns:r="http://schemas.openxmlformats.org/officeDocument/2006/relationships" id="258" r:id="Rc330dc7a88da4341"/>
   </p:sldIdLst>
   <p:sldSz cx="12191695" cy="6858000"/>
   <p:notesSz cx="6858000" cy="9144000"/>
@@ -467,7 +467,7 @@
           <a:lstStyle xmlns:a="http://schemas.openxmlformats.org/drawingml/2006/main"/>
           <a:p xmlns:a="http://schemas.openxmlformats.org/drawingml/2006/main">
             <a:r>
-              <a:t>Sources: NEA Dates of Hawker Centre Closures, https://data.gov.sg/datasets/d_bda4baa634dd1cc7a6c7cad5f19e2d68/view . Counts recomputed from the 22 Sep 2026 snapshot for 28 Sep 2026. No claim of food insecurity is inferred. Town council scheduling role: https://www.nea.gov.sg/our-services/hawker-management/announcements . Team institution/course/year/email are required separately before submission.</a:t>
+              <a:t>Sources: NEA Dates of Hawker Centre Closures, https://data.gov.sg/datasets/d_bda4baa634dd1cc7a6c7cad5f19e2d68/view . Counts recomputed from the 22 Sep 2026 snapshot for 28 Sep 2026. No claim of food insecurity is inferred. Town council scheduling role: https://www.nea.gov.sg/our-services/hawker-management/announcements . Course confirmed by the participant: Computer Science. Institution, year and current Singapore IHL enrolment remain unconfirmed; full team particulars are required before submission.</a:t>
             </a:r>
           </a:p>
         </p:txBody>
@@ -3893,7 +3893,7 @@
           <p:cNvPr id="2" name="Rectangle 1">
             <a:extLst xmlns:a="http://schemas.openxmlformats.org/drawingml/2006/main">
               <a:ext uri="{FF2B5EF4-FFF2-40B4-BE49-F238E27FC236}">
-                <a16:creationId xmlns:a16="http://schemas.microsoft.com/office/drawing/2014/main" id="{6A72E5FB-AC6F-48C7-8F12-0465CE516B2B}"/>
+                <a16:creationId xmlns:a16="http://schemas.microsoft.com/office/drawing/2014/main" id="{8D9E1DB7-6537-4B2B-AA8B-BCBD08F9D14F}"/>
               </a:ext>
             </a:extLst>
           </p:cNvPr>
@@ -3946,7 +3946,7 @@
           <p:cNvPr id="3" name="TextBox 2">
             <a:extLst xmlns:a="http://schemas.openxmlformats.org/drawingml/2006/main">
               <a:ext uri="{FF2B5EF4-FFF2-40B4-BE49-F238E27FC236}">
-                <a16:creationId xmlns:a16="http://schemas.microsoft.com/office/drawing/2014/main" id="{56E9D5E4-43BF-439F-9487-BDB572212EAE}"/>
+                <a16:creationId xmlns:a16="http://schemas.microsoft.com/office/drawing/2014/main" id="{BA5209CB-5970-4119-989B-D1F50CEFF50E}"/>
               </a:ext>
             </a:extLst>
           </p:cNvPr>
@@ -3996,7 +3996,7 @@
           <p:cNvPr id="4" name="TextBox 3">
             <a:extLst xmlns:a="http://schemas.openxmlformats.org/drawingml/2006/main">
               <a:ext uri="{FF2B5EF4-FFF2-40B4-BE49-F238E27FC236}">
-                <a16:creationId xmlns:a16="http://schemas.microsoft.com/office/drawing/2014/main" id="{B9B415DA-19B9-48DB-90F4-39AE84BD44BB}"/>
+                <a16:creationId xmlns:a16="http://schemas.microsoft.com/office/drawing/2014/main" id="{69FE6858-1E9F-4604-9999-48C776EEEB94}"/>
               </a:ext>
             </a:extLst>
           </p:cNvPr>
@@ -4046,7 +4046,7 @@
           <p:cNvPr id="5" name="TextBox 4">
             <a:extLst xmlns:a="http://schemas.openxmlformats.org/drawingml/2006/main">
               <a:ext uri="{FF2B5EF4-FFF2-40B4-BE49-F238E27FC236}">
-                <a16:creationId xmlns:a16="http://schemas.microsoft.com/office/drawing/2014/main" id="{11A4AAC3-5D89-47A5-919D-9AC4E6709C00}"/>
+                <a16:creationId xmlns:a16="http://schemas.microsoft.com/office/drawing/2014/main" id="{7A07599E-B1CB-4FDB-9787-BB9F7F47C650}"/>
               </a:ext>
             </a:extLst>
           </p:cNvPr>
@@ -4111,7 +4111,7 @@
                 <a:ea typeface="Arial"/>
                 <a:cs typeface="Arial"/>
               </a:rPr>
-              <a:t> HawkerBridge     Project owner: Shivam Gupta</a:t>
+              <a:t> HawkerBridge | Shivam Gupta | Course: Computer Science</a:t>
             </a:r>
           </a:p>
           <a:p xmlns:a="http://schemas.openxmlformats.org/drawingml/2006/main">
@@ -4297,7 +4297,7 @@
           <p:cNvPr id="6" name="TextBox 5">
             <a:extLst xmlns:a="http://schemas.openxmlformats.org/drawingml/2006/main">
               <a:ext uri="{FF2B5EF4-FFF2-40B4-BE49-F238E27FC236}">
-                <a16:creationId xmlns:a16="http://schemas.microsoft.com/office/drawing/2014/main" id="{7AC91C7F-7747-4D63-B45C-3522245F84F0}"/>
+                <a16:creationId xmlns:a16="http://schemas.microsoft.com/office/drawing/2014/main" id="{6EA6ED41-DE06-47F6-8338-69C97D0C07E3}"/>
               </a:ext>
             </a:extLst>
           </p:cNvPr>
@@ -4345,7 +4345,7 @@
     </p:spTree>
     <p:extLst>
       <p:ext uri="{BB962C8B-B14F-4D97-AF65-F5344CB8AC3E}">
-        <p14:creationId xmlns:p14="http://schemas.microsoft.com/office/powerpoint/2010/main" val="723970167"/>
+        <p14:creationId xmlns:p14="http://schemas.microsoft.com/office/powerpoint/2010/main" val="1816676705"/>
       </p:ext>
     </p:extLst>
   </p:cSld>
@@ -4369,7 +4369,7 @@
           <p:cNvPr id="2" name="Rectangle 1">
             <a:extLst xmlns:a="http://schemas.openxmlformats.org/drawingml/2006/main">
               <a:ext uri="{FF2B5EF4-FFF2-40B4-BE49-F238E27FC236}">
-                <a16:creationId xmlns:a16="http://schemas.microsoft.com/office/drawing/2014/main" id="{DFBC552B-06D3-4E1B-B6AC-168790DFAD19}"/>
+                <a16:creationId xmlns:a16="http://schemas.microsoft.com/office/drawing/2014/main" id="{06847457-4056-4621-A3B2-EA842214B65C}"/>
               </a:ext>
             </a:extLst>
           </p:cNvPr>
@@ -4422,7 +4422,7 @@
           <p:cNvPr id="3" name="TextBox 2">
             <a:extLst xmlns:a="http://schemas.openxmlformats.org/drawingml/2006/main">
               <a:ext uri="{FF2B5EF4-FFF2-40B4-BE49-F238E27FC236}">
-                <a16:creationId xmlns:a16="http://schemas.microsoft.com/office/drawing/2014/main" id="{C6565453-DDED-43BF-B708-93B1176969B9}"/>
+                <a16:creationId xmlns:a16="http://schemas.microsoft.com/office/drawing/2014/main" id="{C3F0C920-8B51-43AE-B49D-A440E0D60FE6}"/>
               </a:ext>
             </a:extLst>
           </p:cNvPr>
@@ -4472,7 +4472,7 @@
           <p:cNvPr id="4" name="TextBox 3">
             <a:extLst xmlns:a="http://schemas.openxmlformats.org/drawingml/2006/main">
               <a:ext uri="{FF2B5EF4-FFF2-40B4-BE49-F238E27FC236}">
-                <a16:creationId xmlns:a16="http://schemas.microsoft.com/office/drawing/2014/main" id="{7A4CDE82-D28A-42B2-A16D-DA1603D5BC9D}"/>
+                <a16:creationId xmlns:a16="http://schemas.microsoft.com/office/drawing/2014/main" id="{2EF6A861-1140-4EF3-92ED-397074524A73}"/>
               </a:ext>
             </a:extLst>
           </p:cNvPr>
@@ -4522,7 +4522,7 @@
           <p:cNvPr id="5" name="TextBox 4">
             <a:extLst xmlns:a="http://schemas.openxmlformats.org/drawingml/2006/main">
               <a:ext uri="{FF2B5EF4-FFF2-40B4-BE49-F238E27FC236}">
-                <a16:creationId xmlns:a16="http://schemas.microsoft.com/office/drawing/2014/main" id="{D66C7F8B-BCBA-456A-AEF2-59574B546404}"/>
+                <a16:creationId xmlns:a16="http://schemas.microsoft.com/office/drawing/2014/main" id="{DED00722-4C32-455D-8179-F44792F9C653}"/>
               </a:ext>
             </a:extLst>
           </p:cNvPr>
@@ -4729,7 +4729,7 @@
           <p:cNvPr id="6" name="TextBox 5">
             <a:extLst xmlns:a="http://schemas.openxmlformats.org/drawingml/2006/main">
               <a:ext uri="{FF2B5EF4-FFF2-40B4-BE49-F238E27FC236}">
-                <a16:creationId xmlns:a16="http://schemas.microsoft.com/office/drawing/2014/main" id="{417EDCBC-A8E6-478E-87D0-088D04E3FEC6}"/>
+                <a16:creationId xmlns:a16="http://schemas.microsoft.com/office/drawing/2014/main" id="{B45F76FA-EB82-4955-9527-D115CD2EA5B4}"/>
               </a:ext>
             </a:extLst>
           </p:cNvPr>
@@ -4777,7 +4777,7 @@
     </p:spTree>
     <p:extLst>
       <p:ext uri="{BB962C8B-B14F-4D97-AF65-F5344CB8AC3E}">
-        <p14:creationId xmlns:p14="http://schemas.microsoft.com/office/powerpoint/2010/main" val="511374380"/>
+        <p14:creationId xmlns:p14="http://schemas.microsoft.com/office/powerpoint/2010/main" val="507700941"/>
       </p:ext>
     </p:extLst>
   </p:cSld>
@@ -4801,7 +4801,7 @@
           <p:cNvPr id="2" name="Rectangle 1">
             <a:extLst xmlns:a="http://schemas.openxmlformats.org/drawingml/2006/main">
               <a:ext uri="{FF2B5EF4-FFF2-40B4-BE49-F238E27FC236}">
-                <a16:creationId xmlns:a16="http://schemas.microsoft.com/office/drawing/2014/main" id="{13777F4C-90DF-4A5F-8988-95E8FC2B1BAA}"/>
+                <a16:creationId xmlns:a16="http://schemas.microsoft.com/office/drawing/2014/main" id="{0FE63503-431E-4096-A050-B3FD8DEFC037}"/>
               </a:ext>
             </a:extLst>
           </p:cNvPr>
@@ -4854,7 +4854,7 @@
           <p:cNvPr id="3" name="TextBox 2">
             <a:extLst xmlns:a="http://schemas.openxmlformats.org/drawingml/2006/main">
               <a:ext uri="{FF2B5EF4-FFF2-40B4-BE49-F238E27FC236}">
-                <a16:creationId xmlns:a16="http://schemas.microsoft.com/office/drawing/2014/main" id="{2FDBD155-150F-434D-BB4B-7F03665FD397}"/>
+                <a16:creationId xmlns:a16="http://schemas.microsoft.com/office/drawing/2014/main" id="{271E6148-B87C-428C-B55E-494285D470FD}"/>
               </a:ext>
             </a:extLst>
           </p:cNvPr>
@@ -4904,7 +4904,7 @@
           <p:cNvPr id="4" name="TextBox 3">
             <a:extLst xmlns:a="http://schemas.openxmlformats.org/drawingml/2006/main">
               <a:ext uri="{FF2B5EF4-FFF2-40B4-BE49-F238E27FC236}">
-                <a16:creationId xmlns:a16="http://schemas.microsoft.com/office/drawing/2014/main" id="{029B9065-EE59-4D80-8AE3-6F33BAA46B4B}"/>
+                <a16:creationId xmlns:a16="http://schemas.microsoft.com/office/drawing/2014/main" id="{103887E9-0F7A-48DB-9E45-B8985D802819}"/>
               </a:ext>
             </a:extLst>
           </p:cNvPr>
@@ -4954,7 +4954,7 @@
           <p:cNvPr id="5" name="TextBox 4">
             <a:extLst xmlns:a="http://schemas.openxmlformats.org/drawingml/2006/main">
               <a:ext uri="{FF2B5EF4-FFF2-40B4-BE49-F238E27FC236}">
-                <a16:creationId xmlns:a16="http://schemas.microsoft.com/office/drawing/2014/main" id="{74C3A33A-6B1D-42A0-8CA3-8AF0D49A5355}"/>
+                <a16:creationId xmlns:a16="http://schemas.microsoft.com/office/drawing/2014/main" id="{B67385AA-0B8B-431A-9FA0-BE895F2842A2}"/>
               </a:ext>
             </a:extLst>
           </p:cNvPr>
@@ -5161,7 +5161,7 @@
           <p:cNvPr id="6" name="TextBox 5">
             <a:extLst xmlns:a="http://schemas.openxmlformats.org/drawingml/2006/main">
               <a:ext uri="{FF2B5EF4-FFF2-40B4-BE49-F238E27FC236}">
-                <a16:creationId xmlns:a16="http://schemas.microsoft.com/office/drawing/2014/main" id="{1063C419-2BFC-47B0-BD20-96CA123E5D3A}"/>
+                <a16:creationId xmlns:a16="http://schemas.microsoft.com/office/drawing/2014/main" id="{522A925D-51F9-4A59-A407-B5EFFD02FE0C}"/>
               </a:ext>
             </a:extLst>
           </p:cNvPr>
@@ -5209,7 +5209,7 @@
     </p:spTree>
     <p:extLst>
       <p:ext uri="{BB962C8B-B14F-4D97-AF65-F5344CB8AC3E}">
-        <p14:creationId xmlns:p14="http://schemas.microsoft.com/office/powerpoint/2010/main" val="187888764"/>
+        <p14:creationId xmlns:p14="http://schemas.microsoft.com/office/powerpoint/2010/main" val="1319095672"/>
       </p:ext>
     </p:extLst>
   </p:cSld>
